--- a/Task_6_BackEnd/Task6_SmartCheckDatabase.pptx
+++ b/Task_6_BackEnd/Task6_SmartCheckDatabase.pptx
@@ -9,14 +9,15 @@
     <p:sldId id="257" r:id="rId3"/>
     <p:sldId id="258" r:id="rId4"/>
     <p:sldId id="259" r:id="rId5"/>
-    <p:sldId id="260" r:id="rId6"/>
-    <p:sldId id="262" r:id="rId7"/>
-    <p:sldId id="261" r:id="rId8"/>
-    <p:sldId id="263" r:id="rId9"/>
-    <p:sldId id="264" r:id="rId10"/>
-    <p:sldId id="265" r:id="rId11"/>
-    <p:sldId id="267" r:id="rId12"/>
-    <p:sldId id="268" r:id="rId13"/>
+    <p:sldId id="269" r:id="rId6"/>
+    <p:sldId id="260" r:id="rId7"/>
+    <p:sldId id="262" r:id="rId8"/>
+    <p:sldId id="261" r:id="rId9"/>
+    <p:sldId id="263" r:id="rId10"/>
+    <p:sldId id="264" r:id="rId11"/>
+    <p:sldId id="265" r:id="rId12"/>
+    <p:sldId id="267" r:id="rId13"/>
+    <p:sldId id="268" r:id="rId14"/>
   </p:sldIdLst>
   <p:sldSz cx="9144000" cy="6858000" type="screen4x3"/>
   <p:notesSz cx="6858000" cy="9144000"/>
@@ -115,6 +116,22 @@
       </a:defRPr>
     </a:lvl9pPr>
   </p:defaultTextStyle>
+  <p:extLst>
+    <p:ext uri="{EFAFB233-063F-42B5-8137-9DF3F51BA10A}">
+      <p15:sldGuideLst xmlns:p15="http://schemas.microsoft.com/office/powerpoint/2012/main">
+        <p15:guide id="1" orient="horz" pos="2160">
+          <p15:clr>
+            <a:srgbClr val="A4A3A4"/>
+          </p15:clr>
+        </p15:guide>
+        <p15:guide id="2" pos="2880">
+          <p15:clr>
+            <a:srgbClr val="A4A3A4"/>
+          </p15:clr>
+        </p15:guide>
+      </p15:sldGuideLst>
+    </p:ext>
+  </p:extLst>
 </p:presentation>
 </file>
 
@@ -339,7 +356,7 @@
           </a:lstStyle>
           <a:p>
             <a:r>
-              <a:rPr lang="en-US" smtClean="0"/>
+              <a:rPr lang="en-US"/>
               <a:t>Click to edit Master subtitle style</a:t>
             </a:r>
             <a:endParaRPr lang="en-US" dirty="0"/>
@@ -371,7 +388,7 @@
           <a:p>
             <a:fld id="{FA4D6DC1-81B7-4884-ACB5-E61F6F06151E}" type="datetimeFigureOut">
               <a:rPr lang="en-US" smtClean="0"/>
-              <a:t>6/8/2025</a:t>
+              <a:t>6/10/2025</a:t>
             </a:fld>
             <a:endParaRPr lang="en-US"/>
           </a:p>
@@ -460,7 +477,7 @@
           </a:lstStyle>
           <a:p>
             <a:r>
-              <a:rPr lang="en-US" smtClean="0"/>
+              <a:rPr lang="en-US"/>
               <a:t>Click to edit Master title style</a:t>
             </a:r>
             <a:endParaRPr lang="en-US" dirty="0"/>
@@ -508,10 +525,9 @@
           <a:lstStyle/>
           <a:p>
             <a:r>
-              <a:rPr lang="en-US" smtClean="0"/>
+              <a:rPr lang="en-US"/>
               <a:t>Click to edit Master title style</a:t>
             </a:r>
-            <a:endParaRPr lang="en-US"/>
           </a:p>
         </p:txBody>
       </p:sp>
@@ -532,38 +548,37 @@
           <a:p>
             <a:pPr lvl="0"/>
             <a:r>
-              <a:rPr lang="en-US" smtClean="0"/>
+              <a:rPr lang="en-US"/>
               <a:t>Click to edit Master text styles</a:t>
             </a:r>
           </a:p>
           <a:p>
             <a:pPr lvl="1"/>
             <a:r>
-              <a:rPr lang="en-US" smtClean="0"/>
+              <a:rPr lang="en-US"/>
               <a:t>Second level</a:t>
             </a:r>
           </a:p>
           <a:p>
             <a:pPr lvl="2"/>
             <a:r>
-              <a:rPr lang="en-US" smtClean="0"/>
+              <a:rPr lang="en-US"/>
               <a:t>Third level</a:t>
             </a:r>
           </a:p>
           <a:p>
             <a:pPr lvl="3"/>
             <a:r>
-              <a:rPr lang="en-US" smtClean="0"/>
+              <a:rPr lang="en-US"/>
               <a:t>Fourth level</a:t>
             </a:r>
           </a:p>
           <a:p>
             <a:pPr lvl="4"/>
             <a:r>
-              <a:rPr lang="en-US" smtClean="0"/>
+              <a:rPr lang="en-US"/>
               <a:t>Fifth level</a:t>
             </a:r>
-            <a:endParaRPr lang="en-US"/>
           </a:p>
         </p:txBody>
       </p:sp>
@@ -584,7 +599,7 @@
           <a:p>
             <a:fld id="{FA4D6DC1-81B7-4884-ACB5-E61F6F06151E}" type="datetimeFigureOut">
               <a:rPr lang="en-US" smtClean="0"/>
-              <a:t>6/8/2025</a:t>
+              <a:t>6/10/2025</a:t>
             </a:fld>
             <a:endParaRPr lang="en-US"/>
           </a:p>
@@ -770,7 +785,7 @@
           <a:lstStyle/>
           <a:p>
             <a:r>
-              <a:rPr lang="en-US" smtClean="0"/>
+              <a:rPr lang="en-US"/>
               <a:t>Click to edit Master title style</a:t>
             </a:r>
             <a:endParaRPr lang="en-US" dirty="0"/>
@@ -799,35 +814,35 @@
           <a:p>
             <a:pPr lvl="0"/>
             <a:r>
-              <a:rPr lang="en-US" smtClean="0"/>
+              <a:rPr lang="en-US"/>
               <a:t>Click to edit Master text styles</a:t>
             </a:r>
           </a:p>
           <a:p>
             <a:pPr lvl="1"/>
             <a:r>
-              <a:rPr lang="en-US" smtClean="0"/>
+              <a:rPr lang="en-US"/>
               <a:t>Second level</a:t>
             </a:r>
           </a:p>
           <a:p>
             <a:pPr lvl="2"/>
             <a:r>
-              <a:rPr lang="en-US" smtClean="0"/>
+              <a:rPr lang="en-US"/>
               <a:t>Third level</a:t>
             </a:r>
           </a:p>
           <a:p>
             <a:pPr lvl="3"/>
             <a:r>
-              <a:rPr lang="en-US" smtClean="0"/>
+              <a:rPr lang="en-US"/>
               <a:t>Fourth level</a:t>
             </a:r>
           </a:p>
           <a:p>
             <a:pPr lvl="4"/>
             <a:r>
-              <a:rPr lang="en-US" smtClean="0"/>
+              <a:rPr lang="en-US"/>
               <a:t>Fifth level</a:t>
             </a:r>
             <a:endParaRPr lang="en-US" dirty="0"/>
@@ -851,7 +866,7 @@
           <a:p>
             <a:fld id="{FA4D6DC1-81B7-4884-ACB5-E61F6F06151E}" type="datetimeFigureOut">
               <a:rPr lang="en-US" smtClean="0"/>
-              <a:t>6/8/2025</a:t>
+              <a:t>6/10/2025</a:t>
             </a:fld>
             <a:endParaRPr lang="en-US"/>
           </a:p>
@@ -949,35 +964,35 @@
           <a:p>
             <a:pPr lvl="0"/>
             <a:r>
-              <a:rPr lang="en-US" smtClean="0"/>
+              <a:rPr lang="en-US"/>
               <a:t>Click to edit Master text styles</a:t>
             </a:r>
           </a:p>
           <a:p>
             <a:pPr lvl="1"/>
             <a:r>
-              <a:rPr lang="en-US" smtClean="0"/>
+              <a:rPr lang="en-US"/>
               <a:t>Second level</a:t>
             </a:r>
           </a:p>
           <a:p>
             <a:pPr lvl="2"/>
             <a:r>
-              <a:rPr lang="en-US" smtClean="0"/>
+              <a:rPr lang="en-US"/>
               <a:t>Third level</a:t>
             </a:r>
           </a:p>
           <a:p>
             <a:pPr lvl="3"/>
             <a:r>
-              <a:rPr lang="en-US" smtClean="0"/>
+              <a:rPr lang="en-US"/>
               <a:t>Fourth level</a:t>
             </a:r>
           </a:p>
           <a:p>
             <a:pPr lvl="4"/>
             <a:r>
-              <a:rPr lang="en-US" smtClean="0"/>
+              <a:rPr lang="en-US"/>
               <a:t>Fifth level</a:t>
             </a:r>
             <a:endParaRPr lang="en-US" dirty="0"/>
@@ -1001,7 +1016,7 @@
           <a:p>
             <a:fld id="{FA4D6DC1-81B7-4884-ACB5-E61F6F06151E}" type="datetimeFigureOut">
               <a:rPr lang="en-US" smtClean="0"/>
-              <a:t>6/8/2025</a:t>
+              <a:t>6/10/2025</a:t>
             </a:fld>
             <a:endParaRPr lang="en-US"/>
           </a:p>
@@ -1065,10 +1080,9 @@
           <a:lstStyle/>
           <a:p>
             <a:r>
-              <a:rPr lang="en-US" smtClean="0"/>
+              <a:rPr lang="en-US"/>
               <a:t>Click to edit Master title style</a:t>
             </a:r>
-            <a:endParaRPr lang="en-US"/>
           </a:p>
         </p:txBody>
       </p:sp>
@@ -1300,7 +1314,7 @@
           <a:p>
             <a:pPr lvl="0"/>
             <a:r>
-              <a:rPr lang="en-US" smtClean="0"/>
+              <a:rPr lang="en-US"/>
               <a:t>Click to edit Master text styles</a:t>
             </a:r>
           </a:p>
@@ -1331,7 +1345,7 @@
           <a:p>
             <a:fld id="{FA4D6DC1-81B7-4884-ACB5-E61F6F06151E}" type="datetimeFigureOut">
               <a:rPr lang="en-US" smtClean="0"/>
-              <a:t>6/8/2025</a:t>
+              <a:t>6/10/2025</a:t>
             </a:fld>
             <a:endParaRPr lang="en-US"/>
           </a:p>
@@ -1420,7 +1434,7 @@
           </a:lstStyle>
           <a:p>
             <a:r>
-              <a:rPr lang="en-US" smtClean="0"/>
+              <a:rPr lang="en-US"/>
               <a:t>Click to edit Master title style</a:t>
             </a:r>
             <a:endParaRPr lang="en-US" dirty="0"/>
@@ -1502,35 +1516,35 @@
           <a:p>
             <a:pPr lvl="0"/>
             <a:r>
-              <a:rPr lang="en-US" smtClean="0"/>
+              <a:rPr lang="en-US"/>
               <a:t>Click to edit Master text styles</a:t>
             </a:r>
           </a:p>
           <a:p>
             <a:pPr lvl="1"/>
             <a:r>
-              <a:rPr lang="en-US" smtClean="0"/>
+              <a:rPr lang="en-US"/>
               <a:t>Second level</a:t>
             </a:r>
           </a:p>
           <a:p>
             <a:pPr lvl="2"/>
             <a:r>
-              <a:rPr lang="en-US" smtClean="0"/>
+              <a:rPr lang="en-US"/>
               <a:t>Third level</a:t>
             </a:r>
           </a:p>
           <a:p>
             <a:pPr lvl="3"/>
             <a:r>
-              <a:rPr lang="en-US" smtClean="0"/>
+              <a:rPr lang="en-US"/>
               <a:t>Fourth level</a:t>
             </a:r>
           </a:p>
           <a:p>
             <a:pPr lvl="4"/>
             <a:r>
-              <a:rPr lang="en-US" smtClean="0"/>
+              <a:rPr lang="en-US"/>
               <a:t>Fifth level</a:t>
             </a:r>
             <a:endParaRPr lang="en-US" dirty="0"/>
@@ -1587,35 +1601,35 @@
           <a:p>
             <a:pPr lvl="0"/>
             <a:r>
-              <a:rPr lang="en-US" smtClean="0"/>
+              <a:rPr lang="en-US"/>
               <a:t>Click to edit Master text styles</a:t>
             </a:r>
           </a:p>
           <a:p>
             <a:pPr lvl="1"/>
             <a:r>
-              <a:rPr lang="en-US" smtClean="0"/>
+              <a:rPr lang="en-US"/>
               <a:t>Second level</a:t>
             </a:r>
           </a:p>
           <a:p>
             <a:pPr lvl="2"/>
             <a:r>
-              <a:rPr lang="en-US" smtClean="0"/>
+              <a:rPr lang="en-US"/>
               <a:t>Third level</a:t>
             </a:r>
           </a:p>
           <a:p>
             <a:pPr lvl="3"/>
             <a:r>
-              <a:rPr lang="en-US" smtClean="0"/>
+              <a:rPr lang="en-US"/>
               <a:t>Fourth level</a:t>
             </a:r>
           </a:p>
           <a:p>
             <a:pPr lvl="4"/>
             <a:r>
-              <a:rPr lang="en-US" smtClean="0"/>
+              <a:rPr lang="en-US"/>
               <a:t>Fifth level</a:t>
             </a:r>
             <a:endParaRPr lang="en-US" dirty="0"/>
@@ -1639,7 +1653,7 @@
           <a:p>
             <a:fld id="{FA4D6DC1-81B7-4884-ACB5-E61F6F06151E}" type="datetimeFigureOut">
               <a:rPr lang="en-US" smtClean="0"/>
-              <a:t>6/8/2025</a:t>
+              <a:t>6/10/2025</a:t>
             </a:fld>
             <a:endParaRPr lang="en-US"/>
           </a:p>
@@ -1703,10 +1717,9 @@
           <a:lstStyle/>
           <a:p>
             <a:r>
-              <a:rPr lang="en-US" smtClean="0"/>
+              <a:rPr lang="en-US"/>
               <a:t>Click to edit Master title style</a:t>
             </a:r>
-            <a:endParaRPr lang="en-US"/>
           </a:p>
         </p:txBody>
       </p:sp>
@@ -1798,7 +1811,7 @@
           <a:p>
             <a:pPr lvl="0"/>
             <a:r>
-              <a:rPr lang="en-US" smtClean="0"/>
+              <a:rPr lang="en-US"/>
               <a:t>Click to edit Master text styles</a:t>
             </a:r>
           </a:p>
@@ -1854,35 +1867,35 @@
           <a:p>
             <a:pPr lvl="0"/>
             <a:r>
-              <a:rPr lang="en-US" smtClean="0"/>
+              <a:rPr lang="en-US"/>
               <a:t>Click to edit Master text styles</a:t>
             </a:r>
           </a:p>
           <a:p>
             <a:pPr lvl="1"/>
             <a:r>
-              <a:rPr lang="en-US" smtClean="0"/>
+              <a:rPr lang="en-US"/>
               <a:t>Second level</a:t>
             </a:r>
           </a:p>
           <a:p>
             <a:pPr lvl="2"/>
             <a:r>
-              <a:rPr lang="en-US" smtClean="0"/>
+              <a:rPr lang="en-US"/>
               <a:t>Third level</a:t>
             </a:r>
           </a:p>
           <a:p>
             <a:pPr lvl="3"/>
             <a:r>
-              <a:rPr lang="en-US" smtClean="0"/>
+              <a:rPr lang="en-US"/>
               <a:t>Fourth level</a:t>
             </a:r>
           </a:p>
           <a:p>
             <a:pPr lvl="4"/>
             <a:r>
-              <a:rPr lang="en-US" smtClean="0"/>
+              <a:rPr lang="en-US"/>
               <a:t>Fifth level</a:t>
             </a:r>
             <a:endParaRPr lang="en-US" dirty="0"/>
@@ -1952,7 +1965,7 @@
           <a:p>
             <a:pPr lvl="0"/>
             <a:r>
-              <a:rPr lang="en-US" smtClean="0"/>
+              <a:rPr lang="en-US"/>
               <a:t>Click to edit Master text styles</a:t>
             </a:r>
           </a:p>
@@ -2008,35 +2021,35 @@
           <a:p>
             <a:pPr lvl="0"/>
             <a:r>
-              <a:rPr lang="en-US" smtClean="0"/>
+              <a:rPr lang="en-US"/>
               <a:t>Click to edit Master text styles</a:t>
             </a:r>
           </a:p>
           <a:p>
             <a:pPr lvl="1"/>
             <a:r>
-              <a:rPr lang="en-US" smtClean="0"/>
+              <a:rPr lang="en-US"/>
               <a:t>Second level</a:t>
             </a:r>
           </a:p>
           <a:p>
             <a:pPr lvl="2"/>
             <a:r>
-              <a:rPr lang="en-US" smtClean="0"/>
+              <a:rPr lang="en-US"/>
               <a:t>Third level</a:t>
             </a:r>
           </a:p>
           <a:p>
             <a:pPr lvl="3"/>
             <a:r>
-              <a:rPr lang="en-US" smtClean="0"/>
+              <a:rPr lang="en-US"/>
               <a:t>Fourth level</a:t>
             </a:r>
           </a:p>
           <a:p>
             <a:pPr lvl="4"/>
             <a:r>
-              <a:rPr lang="en-US" smtClean="0"/>
+              <a:rPr lang="en-US"/>
               <a:t>Fifth level</a:t>
             </a:r>
             <a:endParaRPr lang="en-US" dirty="0"/>
@@ -2060,7 +2073,7 @@
           <a:p>
             <a:fld id="{FA4D6DC1-81B7-4884-ACB5-E61F6F06151E}" type="datetimeFigureOut">
               <a:rPr lang="en-US" smtClean="0"/>
-              <a:t>6/8/2025</a:t>
+              <a:t>6/10/2025</a:t>
             </a:fld>
             <a:endParaRPr lang="en-US"/>
           </a:p>
@@ -2124,10 +2137,9 @@
           <a:lstStyle/>
           <a:p>
             <a:r>
-              <a:rPr lang="en-US" smtClean="0"/>
+              <a:rPr lang="en-US"/>
               <a:t>Click to edit Master title style</a:t>
             </a:r>
-            <a:endParaRPr lang="en-US"/>
           </a:p>
         </p:txBody>
       </p:sp>
@@ -2173,7 +2185,7 @@
           <a:p>
             <a:fld id="{FA4D6DC1-81B7-4884-ACB5-E61F6F06151E}" type="datetimeFigureOut">
               <a:rPr lang="en-US" smtClean="0"/>
-              <a:t>6/8/2025</a:t>
+              <a:t>6/10/2025</a:t>
             </a:fld>
             <a:endParaRPr lang="en-US"/>
           </a:p>
@@ -2237,10 +2249,9 @@
           <a:lstStyle/>
           <a:p>
             <a:r>
-              <a:rPr lang="en-US" smtClean="0"/>
+              <a:rPr lang="en-US"/>
               <a:t>Click to edit Master title style</a:t>
             </a:r>
-            <a:endParaRPr lang="en-US"/>
           </a:p>
         </p:txBody>
       </p:sp>
@@ -2332,7 +2343,7 @@
           <a:p>
             <a:fld id="{FA4D6DC1-81B7-4884-ACB5-E61F6F06151E}" type="datetimeFigureOut">
               <a:rPr lang="en-US" smtClean="0"/>
-              <a:t>6/8/2025</a:t>
+              <a:t>6/10/2025</a:t>
             </a:fld>
             <a:endParaRPr lang="en-US"/>
           </a:p>
@@ -2595,38 +2606,37 @@
           <a:p>
             <a:pPr lvl="0"/>
             <a:r>
-              <a:rPr lang="en-US" smtClean="0"/>
+              <a:rPr lang="en-US"/>
               <a:t>Click to edit Master text styles</a:t>
             </a:r>
           </a:p>
           <a:p>
             <a:pPr lvl="1"/>
             <a:r>
-              <a:rPr lang="en-US" smtClean="0"/>
+              <a:rPr lang="en-US"/>
               <a:t>Second level</a:t>
             </a:r>
           </a:p>
           <a:p>
             <a:pPr lvl="2"/>
             <a:r>
-              <a:rPr lang="en-US" smtClean="0"/>
+              <a:rPr lang="en-US"/>
               <a:t>Third level</a:t>
             </a:r>
           </a:p>
           <a:p>
             <a:pPr lvl="3"/>
             <a:r>
-              <a:rPr lang="en-US" smtClean="0"/>
+              <a:rPr lang="en-US"/>
               <a:t>Fourth level</a:t>
             </a:r>
           </a:p>
           <a:p>
             <a:pPr lvl="4"/>
             <a:r>
-              <a:rPr lang="en-US" smtClean="0"/>
+              <a:rPr lang="en-US"/>
               <a:t>Fifth level</a:t>
             </a:r>
-            <a:endParaRPr lang="en-US"/>
           </a:p>
         </p:txBody>
       </p:sp>
@@ -2693,7 +2703,7 @@
           <a:p>
             <a:pPr lvl="0"/>
             <a:r>
-              <a:rPr lang="en-US" smtClean="0"/>
+              <a:rPr lang="en-US"/>
               <a:t>Click to edit Master text styles</a:t>
             </a:r>
           </a:p>
@@ -2716,7 +2726,7 @@
           <a:p>
             <a:fld id="{FA4D6DC1-81B7-4884-ACB5-E61F6F06151E}" type="datetimeFigureOut">
               <a:rPr lang="en-US" smtClean="0"/>
-              <a:t>6/8/2025</a:t>
+              <a:t>6/10/2025</a:t>
             </a:fld>
             <a:endParaRPr lang="en-US"/>
           </a:p>
@@ -2801,7 +2811,7 @@
           </a:lstStyle>
           <a:p>
             <a:r>
-              <a:rPr lang="en-US" smtClean="0"/>
+              <a:rPr lang="en-US"/>
               <a:t>Click to edit Master title style</a:t>
             </a:r>
             <a:endParaRPr lang="en-US" dirty="0"/>
@@ -2985,7 +2995,7 @@
           </a:lstStyle>
           <a:p>
             <a:r>
-              <a:rPr lang="en-US" smtClean="0"/>
+              <a:rPr lang="en-US"/>
               <a:t>Click icon to add picture</a:t>
             </a:r>
             <a:endParaRPr lang="en-US" dirty="0"/>
@@ -3055,7 +3065,7 @@
           <a:p>
             <a:pPr lvl="0"/>
             <a:r>
-              <a:rPr lang="en-US" smtClean="0"/>
+              <a:rPr lang="en-US"/>
               <a:t>Click to edit Master text styles</a:t>
             </a:r>
           </a:p>
@@ -3078,7 +3088,7 @@
           <a:p>
             <a:fld id="{FA4D6DC1-81B7-4884-ACB5-E61F6F06151E}" type="datetimeFigureOut">
               <a:rPr lang="en-US" smtClean="0"/>
-              <a:t>6/8/2025</a:t>
+              <a:t>6/10/2025</a:t>
             </a:fld>
             <a:endParaRPr lang="en-US"/>
           </a:p>
@@ -3155,7 +3165,7 @@
           </a:lstStyle>
           <a:p>
             <a:r>
-              <a:rPr lang="en-US" smtClean="0"/>
+              <a:rPr lang="en-US"/>
               <a:t>Click to edit Master title style</a:t>
             </a:r>
             <a:endParaRPr lang="en-US" dirty="0"/>
@@ -3310,7 +3320,7 @@
           <a:lstStyle/>
           <a:p>
             <a:r>
-              <a:rPr lang="en-US" smtClean="0"/>
+              <a:rPr lang="en-US"/>
               <a:t>Click to edit Master title style</a:t>
             </a:r>
             <a:endParaRPr lang="en-US" dirty="0"/>
@@ -3344,35 +3354,35 @@
           <a:p>
             <a:pPr lvl="0"/>
             <a:r>
-              <a:rPr lang="en-US" smtClean="0"/>
+              <a:rPr lang="en-US"/>
               <a:t>Click to edit Master text styles</a:t>
             </a:r>
           </a:p>
           <a:p>
             <a:pPr lvl="1"/>
             <a:r>
-              <a:rPr lang="en-US" smtClean="0"/>
+              <a:rPr lang="en-US"/>
               <a:t>Second level</a:t>
             </a:r>
           </a:p>
           <a:p>
             <a:pPr lvl="2"/>
             <a:r>
-              <a:rPr lang="en-US" smtClean="0"/>
+              <a:rPr lang="en-US"/>
               <a:t>Third level</a:t>
             </a:r>
           </a:p>
           <a:p>
             <a:pPr lvl="3"/>
             <a:r>
-              <a:rPr lang="en-US" smtClean="0"/>
+              <a:rPr lang="en-US"/>
               <a:t>Fourth level</a:t>
             </a:r>
           </a:p>
           <a:p>
             <a:pPr lvl="4"/>
             <a:r>
-              <a:rPr lang="en-US" smtClean="0"/>
+              <a:rPr lang="en-US"/>
               <a:t>Fifth level</a:t>
             </a:r>
             <a:endParaRPr lang="en-US" dirty="0"/>
@@ -3412,7 +3422,7 @@
           <a:p>
             <a:fld id="{FA4D6DC1-81B7-4884-ACB5-E61F6F06151E}" type="datetimeFigureOut">
               <a:rPr lang="en-US" smtClean="0"/>
-              <a:t>6/8/2025</a:t>
+              <a:t>6/10/2025</a:t>
             </a:fld>
             <a:endParaRPr lang="en-US"/>
           </a:p>
@@ -3846,7 +3856,12 @@
             <p:ph type="title"/>
           </p:nvPr>
         </p:nvSpPr>
-        <p:spPr/>
+        <p:spPr>
+          <a:xfrm>
+            <a:off x="304800" y="1600200"/>
+            <a:ext cx="6324600" cy="1828800"/>
+          </a:xfrm>
+        </p:spPr>
         <p:txBody>
           <a:bodyPr>
             <a:normAutofit fontScale="90000"/>
@@ -3855,7 +3870,7 @@
           <a:p>
             <a:r>
               <a:rPr lang="en-US" dirty="0"/>
-              <a:t>SmartCheck: Database Design &amp; Implementation</a:t>
+              <a:t>SmartCheck: Database Design &amp; Backend Implementation</a:t>
             </a:r>
           </a:p>
         </p:txBody>
@@ -3868,7 +3883,7 @@
         </p:nvSpPr>
         <p:spPr>
           <a:xfrm>
-            <a:off x="6934200" y="5486399"/>
+            <a:off x="7010400" y="5410200"/>
             <a:ext cx="2209800" cy="646331"/>
           </a:xfrm>
           <a:prstGeom prst="rect">
@@ -3883,10 +3898,9 @@
           <a:lstStyle/>
           <a:p>
             <a:r>
-              <a:rPr lang="en-US" dirty="0" smtClean="0"/>
+              <a:rPr lang="en-US" dirty="0"/>
               <a:t>PRESENTED BY GROUP12</a:t>
             </a:r>
-            <a:endParaRPr lang="en-US" dirty="0"/>
           </a:p>
         </p:txBody>
       </p:sp>
@@ -3913,8 +3927,8 @@
         </p:blipFill>
         <p:spPr bwMode="auto">
           <a:xfrm>
-            <a:off x="20782" y="3831181"/>
-            <a:ext cx="3255818" cy="2979591"/>
+            <a:off x="152400" y="3429000"/>
+            <a:ext cx="6781799" cy="3429000"/>
           </a:xfrm>
           <a:prstGeom prst="rect">
             <a:avLst/>
@@ -3996,8 +4010,8 @@
         </p:nvSpPr>
         <p:spPr>
           <a:xfrm>
-            <a:off x="152400" y="1676400"/>
-            <a:ext cx="6629401" cy="4910329"/>
+            <a:off x="-1" y="1676400"/>
+            <a:ext cx="6172201" cy="4834129"/>
           </a:xfrm>
         </p:spPr>
         <p:txBody>
@@ -4007,38 +4021,219 @@
           <a:lstStyle/>
           <a:p>
             <a:r>
-              <a:rPr lang="en-US" b="1" dirty="0" smtClean="0"/>
-              <a:t>Normalization</a:t>
-            </a:r>
-            <a:r>
               <a:rPr lang="en-US" b="1" dirty="0"/>
-              <a:t>:</a:t>
+              <a:t>Backend Implementation (Overview):</a:t>
             </a:r>
             <a:endParaRPr lang="en-US" dirty="0"/>
           </a:p>
           <a:p>
             <a:pPr lvl="1"/>
             <a:r>
-              <a:rPr lang="en-US" dirty="0" smtClean="0"/>
-              <a:t>Schema </a:t>
-            </a:r>
-            <a:r>
               <a:rPr lang="en-US" dirty="0"/>
-              <a:t>designed to </a:t>
-            </a:r>
+              <a:t>Started backend development using Node.js/Express.</a:t>
+            </a:r>
+          </a:p>
+          <a:p>
+            <a:pPr lvl="1"/>
+            <a:r>
+              <a:rPr lang="en-US" dirty="0"/>
+              <a:t>Defining API endpoints for core functionalities (e.g., user auth, course data).</a:t>
+            </a:r>
+          </a:p>
+          <a:p>
+            <a:pPr lvl="1"/>
+            <a:r>
+              <a:rPr lang="en-US" dirty="0"/>
+              <a:t>Business logic will interact with the database via these APIs.</a:t>
+            </a:r>
+          </a:p>
+          <a:p>
             <a:r>
               <a:rPr lang="en-US" b="1" dirty="0"/>
-              <a:t>3rd Normal Form (3NF</a:t>
-            </a:r>
-            <a:r>
-              <a:rPr lang="en-US" b="1" dirty="0" smtClean="0"/>
-              <a:t>)</a:t>
-            </a:r>
-            <a:r>
-              <a:rPr lang="en-US" dirty="0" smtClean="0"/>
+              <a:t>Database Connection:</a:t>
+            </a:r>
+            <a:endParaRPr lang="en-US" dirty="0"/>
+          </a:p>
+          <a:p>
+            <a:pPr lvl="1"/>
+            <a:r>
+              <a:rPr lang="en-US" dirty="0"/>
+              <a:t>Established initial connection between the backend application and the SmartCheck database.</a:t>
+            </a:r>
+          </a:p>
+          <a:p>
+            <a:pPr lvl="1"/>
+            <a:r>
+              <a:rPr lang="en-US" dirty="0"/>
+              <a:t>Using [ORM/Driver, e.g., Sequelize, SQLAlchemy, JDBC/ODBC driver] for database interaction.</a:t>
+            </a:r>
+          </a:p>
+          <a:p>
+            <a:endParaRPr lang="en-US" dirty="0"/>
+          </a:p>
+        </p:txBody>
+      </p:sp>
+      <p:sp>
+        <p:nvSpPr>
+          <p:cNvPr id="2" name="Title 1"/>
+          <p:cNvSpPr>
+            <a:spLocks noGrp="1"/>
+          </p:cNvSpPr>
+          <p:nvPr>
+            <p:ph type="title"/>
+          </p:nvPr>
+        </p:nvSpPr>
+        <p:spPr/>
+        <p:txBody>
+          <a:bodyPr>
+            <a:normAutofit fontScale="90000"/>
+          </a:bodyPr>
+          <a:lstStyle/>
+          <a:p>
+            <a:r>
+              <a:rPr lang="en-US" b="1" dirty="0"/>
+              <a:t>Step 5 &amp; 6: Backend &amp; Database Connection (Initial Stages)</a:t>
+            </a:r>
+            <a:endParaRPr lang="en-US" dirty="0"/>
+          </a:p>
+        </p:txBody>
+      </p:sp>
+      <p:pic>
+        <p:nvPicPr>
+          <p:cNvPr id="9218" name="Picture 2"/>
+          <p:cNvPicPr>
+            <a:picLocks noChangeAspect="1" noChangeArrowheads="1"/>
+          </p:cNvPicPr>
+          <p:nvPr/>
+        </p:nvPicPr>
+        <p:blipFill>
+          <a:blip r:embed="rId2" cstate="print">
+            <a:extLst>
+              <a:ext uri="{28A0092B-C50C-407E-A947-70E740481C1C}">
+                <a14:useLocalDpi xmlns:a14="http://schemas.microsoft.com/office/drawing/2010/main" val="0"/>
+              </a:ext>
+            </a:extLst>
+          </a:blip>
+          <a:srcRect/>
+          <a:stretch>
+            <a:fillRect/>
+          </a:stretch>
+        </p:blipFill>
+        <p:spPr bwMode="auto">
+          <a:xfrm>
+            <a:off x="6144126" y="2150364"/>
+            <a:ext cx="2819400" cy="3886200"/>
+          </a:xfrm>
+          <a:prstGeom prst="rect">
+            <a:avLst/>
+          </a:prstGeom>
+          <a:noFill/>
+          <a:ln>
+            <a:noFill/>
+          </a:ln>
+          <a:effectLst/>
+          <a:extLst>
+            <a:ext uri="{909E8E84-426E-40DD-AFC4-6F175D3DCCD1}">
+              <a14:hiddenFill xmlns:a14="http://schemas.microsoft.com/office/drawing/2010/main">
+                <a:solidFill>
+                  <a:schemeClr val="accent1"/>
+                </a:solidFill>
+              </a14:hiddenFill>
+            </a:ext>
+            <a:ext uri="{91240B29-F687-4F45-9708-019B960494DF}">
+              <a14:hiddenLine xmlns:a14="http://schemas.microsoft.com/office/drawing/2010/main" w="9525">
+                <a:solidFill>
+                  <a:schemeClr val="tx1"/>
+                </a:solidFill>
+                <a:miter lim="800000"/>
+                <a:headEnd/>
+                <a:tailEnd/>
+              </a14:hiddenLine>
+            </a:ext>
+            <a:ext uri="{AF507438-7753-43E0-B8FC-AC1667EBCBE1}">
+              <a14:hiddenEffects xmlns:a14="http://schemas.microsoft.com/office/drawing/2010/main">
+                <a:effectLst>
+                  <a:outerShdw dist="35921" dir="2700000" algn="ctr" rotWithShape="0">
+                    <a:schemeClr val="bg2"/>
+                  </a:outerShdw>
+                </a:effectLst>
+              </a14:hiddenEffects>
+            </a:ext>
+          </a:extLst>
+        </p:spPr>
+      </p:pic>
+    </p:spTree>
+    <p:extLst>
+      <p:ext uri="{BB962C8B-B14F-4D97-AF65-F5344CB8AC3E}">
+        <p14:creationId xmlns:p14="http://schemas.microsoft.com/office/powerpoint/2010/main" val="2789607247"/>
+      </p:ext>
+    </p:extLst>
+  </p:cSld>
+  <p:clrMapOvr>
+    <a:masterClrMapping/>
+  </p:clrMapOvr>
+</p:sld>
+</file>
+
+<file path=ppt/slides/slide11.xml><?xml version="1.0" encoding="utf-8"?>
+<p:sld xmlns:a="http://schemas.openxmlformats.org/drawingml/2006/main" xmlns:r="http://schemas.openxmlformats.org/officeDocument/2006/relationships" xmlns:p="http://schemas.openxmlformats.org/presentationml/2006/main">
+  <p:cSld>
+    <p:spTree>
+      <p:nvGrpSpPr>
+        <p:cNvPr id="1" name=""/>
+        <p:cNvGrpSpPr/>
+        <p:nvPr/>
+      </p:nvGrpSpPr>
+      <p:grpSpPr>
+        <a:xfrm>
+          <a:off x="0" y="0"/>
+          <a:ext cx="0" cy="0"/>
+          <a:chOff x="0" y="0"/>
+          <a:chExt cx="0" cy="0"/>
+        </a:xfrm>
+      </p:grpSpPr>
+      <p:sp>
+        <p:nvSpPr>
+          <p:cNvPr id="3" name="Content Placeholder 2"/>
+          <p:cNvSpPr>
+            <a:spLocks noGrp="1"/>
+          </p:cNvSpPr>
+          <p:nvPr>
+            <p:ph idx="1"/>
+          </p:nvPr>
+        </p:nvSpPr>
+        <p:spPr>
+          <a:xfrm>
+            <a:off x="152401" y="1676400"/>
+            <a:ext cx="6324600" cy="4910329"/>
+          </a:xfrm>
+        </p:spPr>
+        <p:txBody>
+          <a:bodyPr>
+            <a:normAutofit/>
+          </a:bodyPr>
+          <a:lstStyle/>
+          <a:p>
+            <a:r>
+              <a:rPr lang="en-US" b="1" dirty="0"/>
+              <a:t>Normalization:</a:t>
+            </a:r>
+            <a:endParaRPr lang="en-US" dirty="0"/>
+          </a:p>
+          <a:p>
+            <a:pPr lvl="1"/>
+            <a:r>
+              <a:rPr lang="en-US" dirty="0"/>
+              <a:t>Schema designed to </a:t>
+            </a:r>
+            <a:r>
+              <a:rPr lang="en-US" b="1" dirty="0"/>
+              <a:t>3rd Normal Form (3NF)</a:t>
+            </a:r>
+            <a:r>
+              <a:rPr lang="en-US" dirty="0"/>
               <a:t>.</a:t>
             </a:r>
-            <a:endParaRPr lang="en-US" dirty="0"/>
           </a:p>
           <a:p>
             <a:pPr lvl="1"/>
@@ -4048,29 +4243,21 @@
             </a:r>
             <a:r>
               <a:rPr lang="en-US" dirty="0"/>
-              <a:t> Reduced data redundancy, minimized update anomalies, improved data consistency</a:t>
-            </a:r>
-            <a:r>
-              <a:rPr lang="en-US" dirty="0" smtClean="0"/>
-              <a:t>.</a:t>
-            </a:r>
-          </a:p>
-          <a:p>
-            <a:r>
-              <a:rPr lang="en-US" b="1" dirty="0" smtClean="0"/>
+              <a:t> Reduced data redundancy, minimized update anomalies, improved data consistency.</a:t>
+            </a:r>
+          </a:p>
+          <a:p>
+            <a:r>
+              <a:rPr lang="en-US" b="1" dirty="0"/>
               <a:t>Data Integrity Mechanisms:</a:t>
             </a:r>
-            <a:endParaRPr lang="en-US" dirty="0" smtClean="0"/>
+            <a:endParaRPr lang="en-US" dirty="0"/>
           </a:p>
           <a:p>
             <a:pPr lvl="1"/>
             <a:r>
-              <a:rPr lang="en-US" b="1" dirty="0" smtClean="0"/>
-              <a:t>Primary </a:t>
-            </a:r>
-            <a:r>
               <a:rPr lang="en-US" b="1" dirty="0"/>
-              <a:t>Keys:</a:t>
+              <a:t>Primary Keys:</a:t>
             </a:r>
             <a:r>
               <a:rPr lang="en-US" dirty="0"/>
@@ -4149,7 +4336,7 @@
         </p:blipFill>
         <p:spPr bwMode="auto">
           <a:xfrm>
-            <a:off x="6629401" y="2987242"/>
+            <a:off x="6485022" y="2362200"/>
             <a:ext cx="2514600" cy="3808413"/>
           </a:xfrm>
           <a:prstGeom prst="rect">
@@ -4203,7 +4390,7 @@
 </p:sld>
 </file>
 
-<file path=ppt/slides/slide11.xml><?xml version="1.0" encoding="utf-8"?>
+<file path=ppt/slides/slide12.xml><?xml version="1.0" encoding="utf-8"?>
 <p:sld xmlns:a="http://schemas.openxmlformats.org/drawingml/2006/main" xmlns:r="http://schemas.openxmlformats.org/officeDocument/2006/relationships" xmlns:p="http://schemas.openxmlformats.org/presentationml/2006/main">
   <p:cSld>
     <p:spTree>
@@ -4232,8 +4419,8 @@
         </p:nvSpPr>
         <p:spPr>
           <a:xfrm>
-            <a:off x="0" y="1676400"/>
-            <a:ext cx="5181601" cy="4407408"/>
+            <a:off x="1" y="1676400"/>
+            <a:ext cx="4768516" cy="4407408"/>
           </a:xfrm>
         </p:spPr>
         <p:txBody>
@@ -4243,12 +4430,8 @@
           <a:lstStyle/>
           <a:p>
             <a:r>
-              <a:rPr lang="en-US" b="1" dirty="0" smtClean="0"/>
-              <a:t>Completed </a:t>
-            </a:r>
-            <a:r>
               <a:rPr lang="en-US" b="1" dirty="0"/>
-              <a:t>for Task 6:</a:t>
+              <a:t>Completed for Task 6:</a:t>
             </a:r>
             <a:endParaRPr lang="en-US" dirty="0"/>
           </a:p>
@@ -4268,24 +4451,16 @@
           </a:p>
           <a:p>
             <a:r>
-              <a:rPr lang="en-US" b="1" dirty="0" smtClean="0"/>
-              <a:t>Next </a:t>
-            </a:r>
-            <a:r>
               <a:rPr lang="en-US" b="1" dirty="0"/>
-              <a:t>Steps:</a:t>
+              <a:t>Next Steps:</a:t>
             </a:r>
             <a:endParaRPr lang="en-US" dirty="0"/>
           </a:p>
           <a:p>
             <a:pPr lvl="1"/>
             <a:r>
-              <a:rPr lang="en-US" dirty="0" smtClean="0"/>
-              <a:t>Refine </a:t>
-            </a:r>
-            <a:r>
               <a:rPr lang="en-US" dirty="0"/>
-              <a:t>indexes based on query performance testing.</a:t>
+              <a:t>Refine indexes based on query performance testing.</a:t>
             </a:r>
           </a:p>
           <a:p>
@@ -4334,7 +4509,7 @@
           <p:nvPr/>
         </p:nvPicPr>
         <p:blipFill>
-          <a:blip r:embed="rId2">
+          <a:blip r:embed="rId2" cstate="print">
             <a:extLst>
               <a:ext uri="{28A0092B-C50C-407E-A947-70E740481C1C}">
                 <a14:useLocalDpi xmlns:a14="http://schemas.microsoft.com/office/drawing/2010/main" val="0"/>
@@ -4348,8 +4523,8 @@
         </p:blipFill>
         <p:spPr bwMode="auto">
           <a:xfrm>
-            <a:off x="4800600" y="2667000"/>
-            <a:ext cx="4343400" cy="4191000"/>
+            <a:off x="4768516" y="2158967"/>
+            <a:ext cx="4146513" cy="4191000"/>
           </a:xfrm>
           <a:prstGeom prst="rect">
             <a:avLst/>
@@ -4402,7 +4577,7 @@
 </p:sld>
 </file>
 
-<file path=ppt/slides/slide12.xml><?xml version="1.0" encoding="utf-8"?>
+<file path=ppt/slides/slide13.xml><?xml version="1.0" encoding="utf-8"?>
 <p:sld xmlns:a="http://schemas.openxmlformats.org/drawingml/2006/main" xmlns:r="http://schemas.openxmlformats.org/officeDocument/2006/relationships" xmlns:p="http://schemas.openxmlformats.org/presentationml/2006/main">
   <p:cSld>
     <p:spTree>
@@ -4427,7 +4602,7 @@
         </p:nvSpPr>
         <p:spPr>
           <a:xfrm>
-            <a:off x="838200" y="2362200"/>
+            <a:off x="762000" y="2644170"/>
             <a:ext cx="7620000" cy="1569660"/>
           </a:xfrm>
           <a:prstGeom prst="rect">
@@ -4443,22 +4618,15 @@
           <a:p>
             <a:pPr algn="ctr"/>
             <a:r>
-              <a:rPr lang="en-US" sz="9600" dirty="0" smtClean="0">
+              <a:rPr lang="en-US" sz="9600" dirty="0">
                 <a:solidFill>
-                  <a:schemeClr val="accent5">
+                  <a:schemeClr val="accent1">
                     <a:lumMod val="75000"/>
                   </a:schemeClr>
                 </a:solidFill>
               </a:rPr>
               <a:t>THANK YOU</a:t>
             </a:r>
-            <a:endParaRPr lang="en-US" sz="9600" dirty="0">
-              <a:solidFill>
-                <a:schemeClr val="accent5">
-                  <a:lumMod val="75000"/>
-                </a:schemeClr>
-              </a:solidFill>
-            </a:endParaRPr>
           </a:p>
         </p:txBody>
       </p:sp>
@@ -4510,30 +4678,13 @@
           <a:lstStyle/>
           <a:p>
             <a:r>
-              <a:rPr lang="en-US" b="1" dirty="0" smtClean="0"/>
-              <a:t>Objective</a:t>
-            </a:r>
-            <a:r>
               <a:rPr lang="en-US" b="1" dirty="0"/>
-              <a:t>:</a:t>
+              <a:t>Objective:</a:t>
             </a:r>
             <a:r>
               <a:rPr lang="en-US" dirty="0"/>
-              <a:t> </a:t>
-            </a:r>
-            <a:r>
-              <a:rPr lang="en-US" dirty="0" smtClean="0"/>
-              <a:t>To </a:t>
-            </a:r>
-            <a:r>
-              <a:rPr lang="en-US" dirty="0"/>
-              <a:t>design and implement a robust, scalable, and normalized database for SmartCheck</a:t>
-            </a:r>
-            <a:r>
-              <a:rPr lang="en-US" dirty="0" smtClean="0"/>
-              <a:t>.</a:t>
-            </a:r>
-            <a:endParaRPr lang="en-US" dirty="0"/>
+              <a:t> To design and implement a robust, scalable, and normalized database for SmartCheck.</a:t>
+            </a:r>
           </a:p>
           <a:p>
             <a:r>
@@ -4719,30 +4870,17 @@
           <a:lstStyle/>
           <a:p>
             <a:r>
-              <a:rPr lang="en-US" b="1" dirty="0" smtClean="0"/>
-              <a:t>Process</a:t>
-            </a:r>
-            <a:r>
               <a:rPr lang="en-US" b="1" dirty="0"/>
-              <a:t>:</a:t>
+              <a:t>Process:</a:t>
             </a:r>
             <a:endParaRPr lang="en-US" dirty="0"/>
           </a:p>
           <a:p>
             <a:pPr lvl="1"/>
             <a:r>
-              <a:rPr lang="en-US" dirty="0" smtClean="0"/>
-              <a:t>Analyzed </a:t>
-            </a:r>
-            <a:r>
               <a:rPr lang="en-US" dirty="0"/>
-              <a:t>system requirements (SRS, Class Diagram) to list all necessary data points for SmartCheck</a:t>
-            </a:r>
-            <a:r>
-              <a:rPr lang="en-US" dirty="0" smtClean="0"/>
-              <a:t>.</a:t>
-            </a:r>
-            <a:endParaRPr lang="en-US" dirty="0"/>
+              <a:t>Analyzed system requirements (SRS, Class Diagram) to list all necessary data points for SmartCheck.</a:t>
+            </a:r>
           </a:p>
           <a:p>
             <a:r>
@@ -4936,8 +5074,8 @@
         </p:nvSpPr>
         <p:spPr>
           <a:xfrm>
-            <a:off x="27709" y="1524000"/>
-            <a:ext cx="4800601" cy="4407408"/>
+            <a:off x="381000" y="1828800"/>
+            <a:ext cx="7848600" cy="4407408"/>
           </a:xfrm>
         </p:spPr>
         <p:txBody>
@@ -4947,29 +5085,18 @@
           <a:lstStyle/>
           <a:p>
             <a:r>
-              <a:rPr lang="en-US" b="1" dirty="0" smtClean="0"/>
-              <a:t>Purpose </a:t>
-            </a:r>
-            <a:r>
               <a:rPr lang="en-US" b="1" dirty="0"/>
-              <a:t>of ERD:</a:t>
+              <a:t>Purpose of ERD:</a:t>
             </a:r>
             <a:r>
               <a:rPr lang="en-US" dirty="0"/>
-              <a:t> </a:t>
-            </a:r>
-            <a:r>
-              <a:rPr lang="en-US" dirty="0" smtClean="0"/>
-              <a:t>To </a:t>
-            </a:r>
-            <a:r>
-              <a:rPr lang="en-US" dirty="0"/>
-              <a:t>create a high-level model showing our system's main entities and how they relate to each other</a:t>
-            </a:r>
-            <a:r>
-              <a:rPr lang="en-US" dirty="0" smtClean="0"/>
-              <a:t>.</a:t>
-            </a:r>
+              <a:t> To create a high-level model showing our system's main entities and how they relate to each other.</a:t>
+            </a:r>
+          </a:p>
+          <a:p>
+            <a:pPr marL="45720" indent="0">
+              <a:buNone/>
+            </a:pPr>
             <a:endParaRPr lang="en-US" dirty="0"/>
           </a:p>
           <a:p>
@@ -5030,9 +5157,45 @@
           </a:p>
         </p:txBody>
       </p:sp>
+    </p:spTree>
+    <p:extLst>
+      <p:ext uri="{BB962C8B-B14F-4D97-AF65-F5344CB8AC3E}">
+        <p14:creationId xmlns:p14="http://schemas.microsoft.com/office/powerpoint/2010/main" val="644976202"/>
+      </p:ext>
+    </p:extLst>
+  </p:cSld>
+  <p:clrMapOvr>
+    <a:masterClrMapping/>
+  </p:clrMapOvr>
+</p:sld>
+</file>
+
+<file path=ppt/slides/slide5.xml><?xml version="1.0" encoding="utf-8"?>
+<p:sld xmlns:a="http://schemas.openxmlformats.org/drawingml/2006/main" xmlns:r="http://schemas.openxmlformats.org/officeDocument/2006/relationships" xmlns:p="http://schemas.openxmlformats.org/presentationml/2006/main">
+  <p:cSld>
+    <p:spTree>
+      <p:nvGrpSpPr>
+        <p:cNvPr id="1" name=""/>
+        <p:cNvGrpSpPr/>
+        <p:nvPr/>
+      </p:nvGrpSpPr>
+      <p:grpSpPr>
+        <a:xfrm>
+          <a:off x="0" y="0"/>
+          <a:ext cx="0" cy="0"/>
+          <a:chOff x="0" y="0"/>
+          <a:chExt cx="0" cy="0"/>
+        </a:xfrm>
+      </p:grpSpPr>
       <p:pic>
         <p:nvPicPr>
-          <p:cNvPr id="5122" name="Picture 2"/>
+          <p:cNvPr id="2" name="Picture 2">
+            <a:extLst>
+              <a:ext uri="{FF2B5EF4-FFF2-40B4-BE49-F238E27FC236}">
+                <a16:creationId xmlns:a16="http://schemas.microsoft.com/office/drawing/2014/main" id="{886C2143-9AAC-2FB5-F242-DC70913B3414}"/>
+              </a:ext>
+            </a:extLst>
+          </p:cNvPr>
           <p:cNvPicPr>
             <a:picLocks noChangeAspect="1" noChangeArrowheads="1"/>
           </p:cNvPicPr>
@@ -5053,8 +5216,8 @@
         </p:blipFill>
         <p:spPr bwMode="auto">
           <a:xfrm>
-            <a:off x="4648200" y="1676400"/>
-            <a:ext cx="4343400" cy="5146964"/>
+            <a:off x="152400" y="152400"/>
+            <a:ext cx="8839200" cy="6553200"/>
           </a:xfrm>
           <a:prstGeom prst="rect">
             <a:avLst/>
@@ -5097,7 +5260,7 @@
     </p:spTree>
     <p:extLst>
       <p:ext uri="{BB962C8B-B14F-4D97-AF65-F5344CB8AC3E}">
-        <p14:creationId xmlns:p14="http://schemas.microsoft.com/office/powerpoint/2010/main" val="644976202"/>
+        <p14:creationId xmlns:p14="http://schemas.microsoft.com/office/powerpoint/2010/main" val="514308748"/>
       </p:ext>
     </p:extLst>
   </p:cSld>
@@ -5107,7 +5270,7 @@
 </p:sld>
 </file>
 
-<file path=ppt/slides/slide5.xml><?xml version="1.0" encoding="utf-8"?>
+<file path=ppt/slides/slide6.xml><?xml version="1.0" encoding="utf-8"?>
 <p:sld xmlns:a="http://schemas.openxmlformats.org/drawingml/2006/main" xmlns:r="http://schemas.openxmlformats.org/officeDocument/2006/relationships" xmlns:p="http://schemas.openxmlformats.org/presentationml/2006/main">
   <p:cSld>
     <p:spTree>
@@ -5148,12 +5311,8 @@
           <a:p>
             <a:pPr lvl="1"/>
             <a:r>
-              <a:rPr lang="en-US" sz="2200" b="1" dirty="0" smtClean="0"/>
-              <a:t>User </a:t>
-            </a:r>
-            <a:r>
               <a:rPr lang="en-US" sz="2200" b="1" dirty="0"/>
-              <a:t>Specialization (1:1):</a:t>
+              <a:t>User Specialization (1:1):</a:t>
             </a:r>
             <a:endParaRPr lang="en-US" sz="2200" dirty="0"/>
           </a:p>
@@ -5174,31 +5333,15 @@
           <a:p>
             <a:pPr lvl="2"/>
             <a:r>
-              <a:rPr lang="en-US" sz="2200" dirty="0" smtClean="0"/>
-              <a:t>Each </a:t>
-            </a:r>
-            <a:r>
               <a:rPr lang="en-US" sz="2200" dirty="0"/>
-              <a:t>Student/Lecturer IS A User, inheriting common attributes</a:t>
-            </a:r>
-            <a:r>
-              <a:rPr lang="en-US" sz="2200" dirty="0" smtClean="0"/>
-              <a:t>.</a:t>
-            </a:r>
-            <a:r>
-              <a:rPr lang="en-US" sz="2200" dirty="0"/>
-              <a:t/>
+              <a:t>Each Student/Lecturer IS A User, inheriting common attributes.</a:t>
             </a:r>
             <a:br>
               <a:rPr lang="en-US" sz="2200" dirty="0"/>
             </a:br>
             <a:r>
-              <a:rPr lang="en-US" sz="2200" b="1" dirty="0" smtClean="0"/>
-              <a:t>Course </a:t>
-            </a:r>
-            <a:r>
               <a:rPr lang="en-US" sz="2200" b="1" dirty="0"/>
-              <a:t>Enrollment (M:N resolved):</a:t>
+              <a:t>Course Enrollment (M:N resolved):</a:t>
             </a:r>
             <a:endParaRPr lang="en-US" sz="2200" dirty="0"/>
           </a:p>
@@ -5212,20 +5355,8 @@
           <a:p>
             <a:pPr lvl="2"/>
             <a:r>
-              <a:rPr lang="en-US" sz="2200" dirty="0" smtClean="0"/>
-              <a:t>Students </a:t>
-            </a:r>
-            <a:r>
               <a:rPr lang="en-US" sz="2200" dirty="0"/>
-              <a:t>and Courses have a many-to-many relationship, managed by the CourseEnrollment table</a:t>
-            </a:r>
-            <a:r>
-              <a:rPr lang="en-US" sz="2200" dirty="0" smtClean="0"/>
-              <a:t>.</a:t>
-            </a:r>
-            <a:r>
-              <a:rPr lang="en-US" sz="2200" dirty="0"/>
-              <a:t/>
+              <a:t>Students and Courses have a many-to-many relationship, managed by the CourseEnrollment table.</a:t>
             </a:r>
             <a:br>
               <a:rPr lang="en-US" sz="2200" dirty="0"/>
@@ -5336,7 +5467,7 @@
 </p:sld>
 </file>
 
-<file path=ppt/slides/slide6.xml><?xml version="1.0" encoding="utf-8"?>
+<file path=ppt/slides/slide7.xml><?xml version="1.0" encoding="utf-8"?>
 <p:sld xmlns:a="http://schemas.openxmlformats.org/drawingml/2006/main" xmlns:r="http://schemas.openxmlformats.org/officeDocument/2006/relationships" xmlns:p="http://schemas.openxmlformats.org/presentationml/2006/main">
   <p:cSld>
     <p:spTree>
@@ -5371,62 +5502,31 @@
           <a:lstStyle/>
           <a:p>
             <a:r>
-              <a:rPr lang="en-US" b="1" dirty="0" smtClean="0"/>
-              <a:t>Process</a:t>
-            </a:r>
-            <a:r>
               <a:rPr lang="en-US" b="1" dirty="0"/>
-              <a:t>:</a:t>
+              <a:t>Process:</a:t>
             </a:r>
             <a:endParaRPr lang="en-US" dirty="0"/>
           </a:p>
           <a:p>
             <a:pPr lvl="1"/>
             <a:r>
-              <a:rPr lang="en-US" dirty="0" smtClean="0"/>
-              <a:t>Translated </a:t>
-            </a:r>
-            <a:r>
               <a:rPr lang="en-US" dirty="0"/>
-              <a:t>the ERD into a detailed relational schema</a:t>
-            </a:r>
-            <a:r>
-              <a:rPr lang="en-US" dirty="0" smtClean="0"/>
-              <a:t>.</a:t>
-            </a:r>
-            <a:endParaRPr lang="en-US" dirty="0"/>
+              <a:t>Translated the ERD into a detailed relational schema.</a:t>
+            </a:r>
           </a:p>
           <a:p>
             <a:pPr lvl="1"/>
             <a:r>
-              <a:rPr lang="en-US" dirty="0" smtClean="0"/>
-              <a:t>Defined </a:t>
-            </a:r>
-            <a:r>
               <a:rPr lang="en-US" dirty="0"/>
-              <a:t>tables, columns, data types, and constraints (PK, FK, NOT NULL, UNIQUE</a:t>
-            </a:r>
-            <a:r>
-              <a:rPr lang="en-US" dirty="0" smtClean="0"/>
-              <a:t>).</a:t>
-            </a:r>
-            <a:endParaRPr lang="en-US" dirty="0"/>
+              <a:t>Defined tables, columns, data types, and constraints (PK, FK, NOT NULL, UNIQUE).</a:t>
+            </a:r>
           </a:p>
           <a:p>
             <a:pPr lvl="1"/>
             <a:r>
-              <a:rPr lang="en-US" dirty="0" smtClean="0"/>
-              <a:t>Focused </a:t>
-            </a:r>
-            <a:r>
               <a:rPr lang="en-US" dirty="0"/>
-              <a:t>on normalization (primarily 3NF) to ensure data integrity and reduce redundancy</a:t>
-            </a:r>
-            <a:r>
-              <a:rPr lang="en-US" dirty="0" smtClean="0"/>
-              <a:t>.</a:t>
-            </a:r>
-            <a:endParaRPr lang="en-US" dirty="0"/>
+              <a:t>Focused on normalization (primarily 3NF) to ensure data integrity and reduce redundancy.</a:t>
+            </a:r>
           </a:p>
           <a:p>
             <a:r>
@@ -5607,7 +5707,7 @@
 </p:sld>
 </file>
 
-<file path=ppt/slides/slide7.xml><?xml version="1.0" encoding="utf-8"?>
+<file path=ppt/slides/slide8.xml><?xml version="1.0" encoding="utf-8"?>
 <p:sld xmlns:a="http://schemas.openxmlformats.org/drawingml/2006/main" xmlns:r="http://schemas.openxmlformats.org/officeDocument/2006/relationships" xmlns:p="http://schemas.openxmlformats.org/presentationml/2006/main">
   <p:cSld>
     <p:spTree>
@@ -5648,59 +5748,28 @@
           <a:p>
             <a:pPr lvl="1"/>
             <a:r>
-              <a:rPr lang="en-US" dirty="0" smtClean="0"/>
-              <a:t>We wrote </a:t>
-            </a:r>
-            <a:r>
               <a:rPr lang="en-US" dirty="0"/>
-              <a:t>SQL Data Definition Language (DDL) statements (CREATE TABLE) based on the schema</a:t>
-            </a:r>
-            <a:r>
-              <a:rPr lang="en-US" dirty="0" smtClean="0"/>
-              <a:t>.</a:t>
-            </a:r>
-            <a:endParaRPr lang="en-US" dirty="0"/>
+              <a:t>We wrote SQL Data Definition Language (DDL) statements (CREATE TABLE) based on the schema.</a:t>
+            </a:r>
           </a:p>
           <a:p>
             <a:pPr lvl="1"/>
             <a:r>
-              <a:rPr lang="en-US" dirty="0" smtClean="0"/>
-              <a:t>Implemented </a:t>
-            </a:r>
-            <a:r>
               <a:rPr lang="en-US" dirty="0"/>
-              <a:t>primary keys, foreign keys, data types, and constraints</a:t>
-            </a:r>
-            <a:r>
-              <a:rPr lang="en-US" dirty="0" smtClean="0"/>
-              <a:t>.</a:t>
-            </a:r>
-            <a:endParaRPr lang="en-US" dirty="0"/>
+              <a:t>Implemented primary keys, foreign keys, data types, and constraints.</a:t>
+            </a:r>
           </a:p>
           <a:p>
             <a:pPr lvl="1"/>
             <a:r>
-              <a:rPr lang="en-US" dirty="0" smtClean="0"/>
-              <a:t>We chose Firebase </a:t>
-            </a:r>
-            <a:r>
               <a:rPr lang="en-US" dirty="0"/>
-              <a:t>for implementation</a:t>
-            </a:r>
-            <a:r>
-              <a:rPr lang="en-US" dirty="0" smtClean="0"/>
-              <a:t>.</a:t>
-            </a:r>
-            <a:endParaRPr lang="en-US" dirty="0"/>
+              <a:t>We chose Firebase for implementation.</a:t>
+            </a:r>
           </a:p>
           <a:p>
             <a:r>
               <a:rPr lang="en-US" b="1" dirty="0"/>
-              <a:t>DDL Snippet (Illustrative</a:t>
-            </a:r>
-            <a:r>
-              <a:rPr lang="en-US" b="1" dirty="0" smtClean="0"/>
-              <a:t>):</a:t>
+              <a:t>DDL Snippet (Illustrative):</a:t>
             </a:r>
           </a:p>
           <a:p>
@@ -5756,8 +5825,8 @@
         </p:blipFill>
         <p:spPr bwMode="auto">
           <a:xfrm>
-            <a:off x="304800" y="4633912"/>
-            <a:ext cx="4038600" cy="1476375"/>
+            <a:off x="304800" y="4191000"/>
+            <a:ext cx="4038600" cy="2133600"/>
           </a:xfrm>
           <a:prstGeom prst="rect">
             <a:avLst/>
@@ -5874,7 +5943,7 @@
 </p:sld>
 </file>
 
-<file path=ppt/slides/slide8.xml><?xml version="1.0" encoding="utf-8"?>
+<file path=ppt/slides/slide9.xml><?xml version="1.0" encoding="utf-8"?>
 <p:sld xmlns:a="http://schemas.openxmlformats.org/drawingml/2006/main" xmlns:r="http://schemas.openxmlformats.org/officeDocument/2006/relationships" xmlns:p="http://schemas.openxmlformats.org/presentationml/2006/main">
   <p:cSld>
     <p:spTree>
@@ -5914,39 +5983,18 @@
           <a:lstStyle/>
           <a:p>
             <a:r>
-              <a:rPr lang="en-US" b="1" dirty="0" smtClean="0"/>
-              <a:t>Purpose</a:t>
-            </a:r>
-            <a:r>
               <a:rPr lang="en-US" b="1" dirty="0"/>
-              <a:t>:</a:t>
+              <a:t>Purpose:</a:t>
             </a:r>
             <a:r>
               <a:rPr lang="en-US" dirty="0"/>
-              <a:t> </a:t>
-            </a:r>
-            <a:r>
-              <a:rPr lang="en-US" dirty="0" smtClean="0"/>
-              <a:t>This </a:t>
-            </a:r>
-            <a:r>
-              <a:rPr lang="en-US" dirty="0"/>
-              <a:t>crucial table stores every attendance instance, linking students, sessions, and verification data</a:t>
-            </a:r>
-            <a:r>
-              <a:rPr lang="en-US" dirty="0" smtClean="0"/>
-              <a:t>.</a:t>
-            </a:r>
-            <a:endParaRPr lang="en-US" dirty="0"/>
+              <a:t> This crucial table stores every attendance instance, linking students, sessions, and verification data.</a:t>
+            </a:r>
           </a:p>
           <a:p>
             <a:r>
               <a:rPr lang="en-US" b="1" dirty="0"/>
-              <a:t>Key Columns &amp; </a:t>
-            </a:r>
-            <a:r>
-              <a:rPr lang="en-US" b="1" dirty="0" smtClean="0"/>
-              <a:t>FKs:</a:t>
+              <a:t>Key Columns &amp; FKs:</a:t>
             </a:r>
             <a:endParaRPr lang="en-US" dirty="0"/>
           </a:p>
@@ -6045,7 +6093,7 @@
         </p:blipFill>
         <p:spPr bwMode="auto">
           <a:xfrm>
-            <a:off x="6347980" y="2667000"/>
+            <a:off x="5867400" y="2286000"/>
             <a:ext cx="2809875" cy="2009775"/>
           </a:xfrm>
           <a:prstGeom prst="rect">
@@ -6090,248 +6138,6 @@
     <p:extLst>
       <p:ext uri="{BB962C8B-B14F-4D97-AF65-F5344CB8AC3E}">
         <p14:creationId xmlns:p14="http://schemas.microsoft.com/office/powerpoint/2010/main" val="1186977092"/>
-      </p:ext>
-    </p:extLst>
-  </p:cSld>
-  <p:clrMapOvr>
-    <a:masterClrMapping/>
-  </p:clrMapOvr>
-</p:sld>
-</file>
-
-<file path=ppt/slides/slide9.xml><?xml version="1.0" encoding="utf-8"?>
-<p:sld xmlns:a="http://schemas.openxmlformats.org/drawingml/2006/main" xmlns:r="http://schemas.openxmlformats.org/officeDocument/2006/relationships" xmlns:p="http://schemas.openxmlformats.org/presentationml/2006/main">
-  <p:cSld>
-    <p:spTree>
-      <p:nvGrpSpPr>
-        <p:cNvPr id="1" name=""/>
-        <p:cNvGrpSpPr/>
-        <p:nvPr/>
-      </p:nvGrpSpPr>
-      <p:grpSpPr>
-        <a:xfrm>
-          <a:off x="0" y="0"/>
-          <a:ext cx="0" cy="0"/>
-          <a:chOff x="0" y="0"/>
-          <a:chExt cx="0" cy="0"/>
-        </a:xfrm>
-      </p:grpSpPr>
-      <p:sp>
-        <p:nvSpPr>
-          <p:cNvPr id="3" name="Content Placeholder 2"/>
-          <p:cNvSpPr>
-            <a:spLocks noGrp="1"/>
-          </p:cNvSpPr>
-          <p:nvPr>
-            <p:ph idx="1"/>
-          </p:nvPr>
-        </p:nvSpPr>
-        <p:spPr>
-          <a:xfrm>
-            <a:off x="-1" y="1676400"/>
-            <a:ext cx="6477001" cy="4834129"/>
-          </a:xfrm>
-        </p:spPr>
-        <p:txBody>
-          <a:bodyPr>
-            <a:normAutofit/>
-          </a:bodyPr>
-          <a:lstStyle/>
-          <a:p>
-            <a:r>
-              <a:rPr lang="en-US" b="1" dirty="0" smtClean="0"/>
-              <a:t>Backend </a:t>
-            </a:r>
-            <a:r>
-              <a:rPr lang="en-US" b="1" dirty="0"/>
-              <a:t>Implementation (Overview):</a:t>
-            </a:r>
-            <a:endParaRPr lang="en-US" dirty="0"/>
-          </a:p>
-          <a:p>
-            <a:pPr lvl="1"/>
-            <a:r>
-              <a:rPr lang="en-US" dirty="0" smtClean="0"/>
-              <a:t>Started </a:t>
-            </a:r>
-            <a:r>
-              <a:rPr lang="en-US" dirty="0"/>
-              <a:t>backend development </a:t>
-            </a:r>
-            <a:r>
-              <a:rPr lang="en-US" dirty="0" smtClean="0"/>
-              <a:t>using Node.js/Express.</a:t>
-            </a:r>
-            <a:endParaRPr lang="en-US" dirty="0"/>
-          </a:p>
-          <a:p>
-            <a:pPr lvl="1"/>
-            <a:r>
-              <a:rPr lang="en-US" dirty="0" smtClean="0"/>
-              <a:t>Defining </a:t>
-            </a:r>
-            <a:r>
-              <a:rPr lang="en-US" dirty="0"/>
-              <a:t>API endpoints for core functionalities (e.g., user auth, course data</a:t>
-            </a:r>
-            <a:r>
-              <a:rPr lang="en-US" dirty="0" smtClean="0"/>
-              <a:t>).</a:t>
-            </a:r>
-            <a:endParaRPr lang="en-US" dirty="0"/>
-          </a:p>
-          <a:p>
-            <a:pPr lvl="1"/>
-            <a:r>
-              <a:rPr lang="en-US" dirty="0" smtClean="0"/>
-              <a:t>Business </a:t>
-            </a:r>
-            <a:r>
-              <a:rPr lang="en-US" dirty="0"/>
-              <a:t>logic will interact with the database via these APIs</a:t>
-            </a:r>
-            <a:r>
-              <a:rPr lang="en-US" dirty="0" smtClean="0"/>
-              <a:t>.</a:t>
-            </a:r>
-          </a:p>
-          <a:p>
-            <a:r>
-              <a:rPr lang="en-US" b="1" dirty="0" smtClean="0"/>
-              <a:t>Database Connection:</a:t>
-            </a:r>
-            <a:endParaRPr lang="en-US" dirty="0" smtClean="0"/>
-          </a:p>
-          <a:p>
-            <a:pPr lvl="1"/>
-            <a:r>
-              <a:rPr lang="en-US" dirty="0" smtClean="0"/>
-              <a:t>Established </a:t>
-            </a:r>
-            <a:r>
-              <a:rPr lang="en-US" dirty="0"/>
-              <a:t>initial connection between the backend application and the SmartCheck database</a:t>
-            </a:r>
-            <a:r>
-              <a:rPr lang="en-US" dirty="0" smtClean="0"/>
-              <a:t>.</a:t>
-            </a:r>
-            <a:endParaRPr lang="en-US" dirty="0"/>
-          </a:p>
-          <a:p>
-            <a:pPr lvl="1"/>
-            <a:r>
-              <a:rPr lang="en-US" dirty="0" smtClean="0"/>
-              <a:t>Using </a:t>
-            </a:r>
-            <a:r>
-              <a:rPr lang="en-US" dirty="0"/>
-              <a:t>[ORM/Driver, e.g., Sequelize, SQLAlchemy, JDBC/ODBC driver] for database interaction</a:t>
-            </a:r>
-            <a:r>
-              <a:rPr lang="en-US" dirty="0" smtClean="0"/>
-              <a:t>.</a:t>
-            </a:r>
-            <a:endParaRPr lang="en-US" dirty="0"/>
-          </a:p>
-          <a:p>
-            <a:endParaRPr lang="en-US" dirty="0"/>
-          </a:p>
-        </p:txBody>
-      </p:sp>
-      <p:sp>
-        <p:nvSpPr>
-          <p:cNvPr id="2" name="Title 1"/>
-          <p:cNvSpPr>
-            <a:spLocks noGrp="1"/>
-          </p:cNvSpPr>
-          <p:nvPr>
-            <p:ph type="title"/>
-          </p:nvPr>
-        </p:nvSpPr>
-        <p:spPr/>
-        <p:txBody>
-          <a:bodyPr>
-            <a:normAutofit fontScale="90000"/>
-          </a:bodyPr>
-          <a:lstStyle/>
-          <a:p>
-            <a:r>
-              <a:rPr lang="en-US" b="1" dirty="0"/>
-              <a:t>Step 5 &amp; 6: Backend &amp; Database Connection (Initial Stages)</a:t>
-            </a:r>
-            <a:endParaRPr lang="en-US" dirty="0"/>
-          </a:p>
-        </p:txBody>
-      </p:sp>
-      <p:pic>
-        <p:nvPicPr>
-          <p:cNvPr id="9218" name="Picture 2"/>
-          <p:cNvPicPr>
-            <a:picLocks noChangeAspect="1" noChangeArrowheads="1"/>
-          </p:cNvPicPr>
-          <p:nvPr/>
-        </p:nvPicPr>
-        <p:blipFill>
-          <a:blip r:embed="rId2" cstate="print">
-            <a:extLst>
-              <a:ext uri="{28A0092B-C50C-407E-A947-70E740481C1C}">
-                <a14:useLocalDpi xmlns:a14="http://schemas.microsoft.com/office/drawing/2010/main" val="0"/>
-              </a:ext>
-            </a:extLst>
-          </a:blip>
-          <a:srcRect/>
-          <a:stretch>
-            <a:fillRect/>
-          </a:stretch>
-        </p:blipFill>
-        <p:spPr bwMode="auto">
-          <a:xfrm>
-            <a:off x="6324600" y="3512127"/>
-            <a:ext cx="2819400" cy="3200400"/>
-          </a:xfrm>
-          <a:prstGeom prst="rect">
-            <a:avLst/>
-          </a:prstGeom>
-          <a:noFill/>
-          <a:ln>
-            <a:noFill/>
-          </a:ln>
-          <a:effectLst/>
-          <a:extLst>
-            <a:ext uri="{909E8E84-426E-40DD-AFC4-6F175D3DCCD1}">
-              <a14:hiddenFill xmlns:a14="http://schemas.microsoft.com/office/drawing/2010/main">
-                <a:solidFill>
-                  <a:schemeClr val="accent1"/>
-                </a:solidFill>
-              </a14:hiddenFill>
-            </a:ext>
-            <a:ext uri="{91240B29-F687-4F45-9708-019B960494DF}">
-              <a14:hiddenLine xmlns:a14="http://schemas.microsoft.com/office/drawing/2010/main" w="9525">
-                <a:solidFill>
-                  <a:schemeClr val="tx1"/>
-                </a:solidFill>
-                <a:miter lim="800000"/>
-                <a:headEnd/>
-                <a:tailEnd/>
-              </a14:hiddenLine>
-            </a:ext>
-            <a:ext uri="{AF507438-7753-43E0-B8FC-AC1667EBCBE1}">
-              <a14:hiddenEffects xmlns:a14="http://schemas.microsoft.com/office/drawing/2010/main">
-                <a:effectLst>
-                  <a:outerShdw dist="35921" dir="2700000" algn="ctr" rotWithShape="0">
-                    <a:schemeClr val="bg2"/>
-                  </a:outerShdw>
-                </a:effectLst>
-              </a14:hiddenEffects>
-            </a:ext>
-          </a:extLst>
-        </p:spPr>
-      </p:pic>
-    </p:spTree>
-    <p:extLst>
-      <p:ext uri="{BB962C8B-B14F-4D97-AF65-F5344CB8AC3E}">
-        <p14:creationId xmlns:p14="http://schemas.microsoft.com/office/powerpoint/2010/main" val="2789607247"/>
       </p:ext>
     </p:extLst>
   </p:cSld>
